--- a/EsercizioLez3.pptx
+++ b/EsercizioLez3.pptx
@@ -105,6 +105,11 @@
       </a:defRPr>
     </a:lvl9pPr>
   </p:defaultTextStyle>
+  <p:extLst>
+    <p:ext uri="{EFAFB233-063F-42B5-8137-9DF3F51BA10A}">
+      <p15:sldGuideLst xmlns:p15="http://schemas.microsoft.com/office/powerpoint/2012/main"/>
+    </p:ext>
+  </p:extLst>
 </p:presentation>
 </file>
 
@@ -113,7 +118,7 @@
   <pc:docChgLst>
     <pc:chgData name="Alessandro Di Piazza" userId="242384fd-1746-4b70-8d90-c83f4330e5ed" providerId="ADAL" clId="{FFF1DA74-BEAE-470B-8D8A-B7A1F3E1BF85}"/>
     <pc:docChg chg="custSel addSld delSld modSld">
-      <pc:chgData name="Alessandro Di Piazza" userId="242384fd-1746-4b70-8d90-c83f4330e5ed" providerId="ADAL" clId="{FFF1DA74-BEAE-470B-8D8A-B7A1F3E1BF85}" dt="2026-05-29T07:09:13.515" v="64" actId="2696"/>
+      <pc:chgData name="Alessandro Di Piazza" userId="242384fd-1746-4b70-8d90-c83f4330e5ed" providerId="ADAL" clId="{FFF1DA74-BEAE-470B-8D8A-B7A1F3E1BF85}" dt="2026-05-29T14:02:44.413" v="72" actId="20577"/>
       <pc:docMkLst>
         <pc:docMk/>
       </pc:docMkLst>
@@ -141,7 +146,7 @@
         </pc:spChg>
       </pc:sldChg>
       <pc:sldChg chg="addSp modSp new mod">
-        <pc:chgData name="Alessandro Di Piazza" userId="242384fd-1746-4b70-8d90-c83f4330e5ed" providerId="ADAL" clId="{FFF1DA74-BEAE-470B-8D8A-B7A1F3E1BF85}" dt="2026-05-29T07:09:01.984" v="60" actId="20577"/>
+        <pc:chgData name="Alessandro Di Piazza" userId="242384fd-1746-4b70-8d90-c83f4330e5ed" providerId="ADAL" clId="{FFF1DA74-BEAE-470B-8D8A-B7A1F3E1BF85}" dt="2026-05-29T14:02:44.413" v="72" actId="20577"/>
         <pc:sldMkLst>
           <pc:docMk/>
           <pc:sldMk cId="1540185058" sldId="257"/>
@@ -155,7 +160,7 @@
           </ac:spMkLst>
         </pc:spChg>
         <pc:spChg chg="mod">
-          <ac:chgData name="Alessandro Di Piazza" userId="242384fd-1746-4b70-8d90-c83f4330e5ed" providerId="ADAL" clId="{FFF1DA74-BEAE-470B-8D8A-B7A1F3E1BF85}" dt="2026-05-29T07:08:53.429" v="43" actId="20577"/>
+          <ac:chgData name="Alessandro Di Piazza" userId="242384fd-1746-4b70-8d90-c83f4330e5ed" providerId="ADAL" clId="{FFF1DA74-BEAE-470B-8D8A-B7A1F3E1BF85}" dt="2026-05-29T14:02:44.413" v="72" actId="20577"/>
           <ac:spMkLst>
             <pc:docMk/>
             <pc:sldMk cId="1540185058" sldId="257"/>
@@ -3679,7 +3684,7 @@
           <a:p>
             <a:r>
               <a:rPr lang="it-IT" dirty="0"/>
-              <a:t>Calcoli il prodotto matriciale (A @ B). </a:t>
+              <a:t>Calcoli il prodotto matriciale (A dot B ). </a:t>
             </a:r>
           </a:p>
           <a:p>
